--- a/Lens.pptx
+++ b/Lens.pptx
@@ -5,7 +5,7 @@
     <p:sldMasterId id="2147483648" r:id="rId1"/>
   </p:sldMasterIdLst>
   <p:notesMasterIdLst>
-    <p:notesMasterId r:id="rId11"/>
+    <p:notesMasterId r:id="rId12"/>
   </p:notesMasterIdLst>
   <p:sldIdLst>
     <p:sldId id="256" r:id="rId2"/>
@@ -17,6 +17,7 @@
     <p:sldId id="262" r:id="rId8"/>
     <p:sldId id="263" r:id="rId9"/>
     <p:sldId id="264" r:id="rId10"/>
+    <p:sldId id="265" r:id="rId11"/>
   </p:sldIdLst>
   <p:sldSz cx="12192000" cy="6858000"/>
   <p:notesSz cx="6858000" cy="9144000"/>
@@ -3851,6 +3852,236 @@
     <p:extLst>
       <p:ext uri="{BB962C8B-B14F-4D97-AF65-F5344CB8AC3E}">
         <p14:creationId xmlns:p14="http://schemas.microsoft.com/office/powerpoint/2010/main" val="2772429069"/>
+      </p:ext>
+    </p:extLst>
+  </p:cSld>
+  <p:clrMapOvr>
+    <a:masterClrMapping/>
+  </p:clrMapOvr>
+</p:sld>
+</file>
+
+<file path=ppt/slides/slide10.xml><?xml version="1.0" encoding="utf-8"?>
+<p:sld xmlns:a="http://schemas.openxmlformats.org/drawingml/2006/main" xmlns:r="http://schemas.openxmlformats.org/officeDocument/2006/relationships" xmlns:p="http://schemas.openxmlformats.org/presentationml/2006/main">
+  <p:cSld>
+    <p:spTree>
+      <p:nvGrpSpPr>
+        <p:cNvPr id="1" name="">
+          <a:extLst>
+            <a:ext uri="{FF2B5EF4-FFF2-40B4-BE49-F238E27FC236}">
+              <a16:creationId xmlns:a16="http://schemas.microsoft.com/office/drawing/2014/main" id="{43FB51FB-8EAC-FA21-EB9E-3F5EC84FA22A}"/>
+            </a:ext>
+          </a:extLst>
+        </p:cNvPr>
+        <p:cNvGrpSpPr/>
+        <p:nvPr/>
+      </p:nvGrpSpPr>
+      <p:grpSpPr>
+        <a:xfrm>
+          <a:off x="0" y="0"/>
+          <a:ext cx="0" cy="0"/>
+          <a:chOff x="0" y="0"/>
+          <a:chExt cx="0" cy="0"/>
+        </a:xfrm>
+      </p:grpSpPr>
+      <p:sp>
+        <p:nvSpPr>
+          <p:cNvPr id="2" name="Footer Placeholder 1">
+            <a:extLst>
+              <a:ext uri="{FF2B5EF4-FFF2-40B4-BE49-F238E27FC236}">
+                <a16:creationId xmlns:a16="http://schemas.microsoft.com/office/drawing/2014/main" id="{6F95DB34-A3B4-47FF-6B6A-22D08AC83CAD}"/>
+              </a:ext>
+            </a:extLst>
+          </p:cNvPr>
+          <p:cNvSpPr>
+            <a:spLocks noGrp="1"/>
+          </p:cNvSpPr>
+          <p:nvPr>
+            <p:ph type="ftr" sz="quarter" idx="11"/>
+          </p:nvPr>
+        </p:nvSpPr>
+        <p:spPr/>
+        <p:txBody>
+          <a:bodyPr/>
+          <a:lstStyle/>
+          <a:p>
+            <a:r>
+              <a:rPr lang="en-US" dirty="0"/>
+              <a:t>COT6930</a:t>
+            </a:r>
+          </a:p>
+        </p:txBody>
+      </p:sp>
+      <p:sp>
+        <p:nvSpPr>
+          <p:cNvPr id="3" name="Slide Number Placeholder 2">
+            <a:extLst>
+              <a:ext uri="{FF2B5EF4-FFF2-40B4-BE49-F238E27FC236}">
+                <a16:creationId xmlns:a16="http://schemas.microsoft.com/office/drawing/2014/main" id="{9AA10EEE-4509-FEAC-678C-BDFF3DEE0608}"/>
+              </a:ext>
+            </a:extLst>
+          </p:cNvPr>
+          <p:cNvSpPr>
+            <a:spLocks noGrp="1"/>
+          </p:cNvSpPr>
+          <p:nvPr>
+            <p:ph type="sldNum" sz="quarter" idx="12"/>
+          </p:nvPr>
+        </p:nvSpPr>
+        <p:spPr/>
+        <p:txBody>
+          <a:bodyPr/>
+          <a:lstStyle/>
+          <a:p>
+            <a:fld id="{C344351F-3311-4B10-BCB1-06C82B277977}" type="slidenum">
+              <a:rPr lang="en-US" smtClean="0"/>
+              <a:t>10</a:t>
+            </a:fld>
+            <a:endParaRPr lang="en-US"/>
+          </a:p>
+        </p:txBody>
+      </p:sp>
+      <p:cxnSp>
+        <p:nvCxnSpPr>
+          <p:cNvPr id="6" name="Straight Connector 5">
+            <a:extLst>
+              <a:ext uri="{FF2B5EF4-FFF2-40B4-BE49-F238E27FC236}">
+                <a16:creationId xmlns:a16="http://schemas.microsoft.com/office/drawing/2014/main" id="{FFDEECB4-D67A-64CC-5DF6-9E5BF5E983B2}"/>
+              </a:ext>
+            </a:extLst>
+          </p:cNvPr>
+          <p:cNvCxnSpPr/>
+          <p:nvPr/>
+        </p:nvCxnSpPr>
+        <p:spPr>
+          <a:xfrm>
+            <a:off x="0" y="894736"/>
+            <a:ext cx="12192000" cy="0"/>
+          </a:xfrm>
+          <a:prstGeom prst="line">
+            <a:avLst/>
+          </a:prstGeom>
+        </p:spPr>
+        <p:style>
+          <a:lnRef idx="2">
+            <a:schemeClr val="accent1"/>
+          </a:lnRef>
+          <a:fillRef idx="0">
+            <a:schemeClr val="accent1"/>
+          </a:fillRef>
+          <a:effectRef idx="1">
+            <a:schemeClr val="accent1"/>
+          </a:effectRef>
+          <a:fontRef idx="minor">
+            <a:schemeClr val="tx1"/>
+          </a:fontRef>
+        </p:style>
+      </p:cxnSp>
+      <p:sp>
+        <p:nvSpPr>
+          <p:cNvPr id="7" name="TextBox 6">
+            <a:extLst>
+              <a:ext uri="{FF2B5EF4-FFF2-40B4-BE49-F238E27FC236}">
+                <a16:creationId xmlns:a16="http://schemas.microsoft.com/office/drawing/2014/main" id="{3AB691D7-A877-3D35-ED84-FB5F5343FDC3}"/>
+              </a:ext>
+            </a:extLst>
+          </p:cNvPr>
+          <p:cNvSpPr txBox="1"/>
+          <p:nvPr/>
+        </p:nvSpPr>
+        <p:spPr>
+          <a:xfrm>
+            <a:off x="0" y="196447"/>
+            <a:ext cx="12192000" cy="523220"/>
+          </a:xfrm>
+          <a:prstGeom prst="rect">
+            <a:avLst/>
+          </a:prstGeom>
+          <a:noFill/>
+        </p:spPr>
+        <p:txBody>
+          <a:bodyPr wrap="square" rtlCol="0">
+            <a:spAutoFit/>
+          </a:bodyPr>
+          <a:lstStyle/>
+          <a:p>
+            <a:r>
+              <a:rPr lang="en-US" sz="2800" dirty="0"/>
+              <a:t>Reflections </a:t>
+            </a:r>
+          </a:p>
+        </p:txBody>
+      </p:sp>
+      <p:sp>
+        <p:nvSpPr>
+          <p:cNvPr id="16" name="TextBox 15">
+            <a:extLst>
+              <a:ext uri="{FF2B5EF4-FFF2-40B4-BE49-F238E27FC236}">
+                <a16:creationId xmlns:a16="http://schemas.microsoft.com/office/drawing/2014/main" id="{3F034109-1E99-CAB2-8522-A8FE97409AFB}"/>
+              </a:ext>
+            </a:extLst>
+          </p:cNvPr>
+          <p:cNvSpPr txBox="1"/>
+          <p:nvPr/>
+        </p:nvSpPr>
+        <p:spPr>
+          <a:xfrm>
+            <a:off x="471948" y="1069806"/>
+            <a:ext cx="11395587" cy="3139321"/>
+          </a:xfrm>
+          <a:prstGeom prst="rect">
+            <a:avLst/>
+          </a:prstGeom>
+          <a:noFill/>
+        </p:spPr>
+        <p:txBody>
+          <a:bodyPr wrap="square" rtlCol="0">
+            <a:spAutoFit/>
+          </a:bodyPr>
+          <a:lstStyle/>
+          <a:p>
+            <a:r>
+              <a:rPr lang="en-US" dirty="0"/>
+              <a:t>The LENS project aimed to engineer a secure, fairness-aware recommendation pipeline. While I successfully analyzed popularity bias (Gini 0.634) and demographic skew (71.7% male), the project's core challenge was architectural: simulating a hostile, real-time environment using the static MovieLens dataset. This mismatch between static data and streaming infrastructure created significant friction.</a:t>
+            </a:r>
+          </a:p>
+          <a:p>
+            <a:r>
+              <a:rPr lang="en-US" dirty="0"/>
+              <a:t> </a:t>
+            </a:r>
+          </a:p>
+          <a:p>
+            <a:r>
+              <a:rPr lang="en-US" b="1" dirty="0"/>
+              <a:t>The Hardest Parts: Kafka &amp; Streaming Challenges</a:t>
+            </a:r>
+            <a:r>
+              <a:rPr lang="en-US" dirty="0"/>
+              <a:t> The most difficult aspect was not the machine learning, but the plumbing required to secure and transport the data. </a:t>
+            </a:r>
+          </a:p>
+          <a:p>
+            <a:r>
+              <a:rPr lang="en-US" dirty="0"/>
+              <a:t> </a:t>
+            </a:r>
+          </a:p>
+          <a:p>
+            <a:r>
+              <a:rPr lang="en-US" dirty="0"/>
+              <a:t>If I restarted, I would use Mocking Frameworks earlier. Spinning up the full Zookeeper/Broker stack for unit tests was inefficient; mocking Kafka would have allowed faster iteration on the fairness logic.</a:t>
+            </a:r>
+          </a:p>
+          <a:p>
+            <a:endParaRPr lang="en-US" dirty="0"/>
+          </a:p>
+        </p:txBody>
+      </p:sp>
+    </p:spTree>
+    <p:extLst>
+      <p:ext uri="{BB962C8B-B14F-4D97-AF65-F5344CB8AC3E}">
+        <p14:creationId xmlns:p14="http://schemas.microsoft.com/office/powerpoint/2010/main" val="3594059085"/>
       </p:ext>
     </p:extLst>
   </p:cSld>
